--- a/deepseek/shanghai-metro.pptx
+++ b/deepseek/shanghai-metro.pptx
@@ -3084,7 +3084,7 @@
     <p:bg>
       <p:bgPr>
         <a:solidFill>
-          <a:srgbClr val="1A1A2E"/>
+          <a:srgbClr val="FFFFFF"/>
         </a:solidFill>
         <a:effectLst/>
       </p:bgPr>
@@ -3105,7 +3105,7 @@
         <p:spPr>
           <a:xfrm>
             <a:off x="731520" y="457200"/>
-            <a:ext cx="7680960" cy="1097280"/>
+            <a:ext cx="7680960" cy="914400"/>
           </a:xfrm>
           <a:prstGeom prst="rect">
             <a:avLst/>
@@ -3121,7 +3121,7 @@
             <a:pPr algn="l">
               <a:defRPr sz="3600" b="1">
                 <a:solidFill>
-                  <a:srgbClr val="4ADE80"/>
+                  <a:srgbClr val="1A73E8"/>
                 </a:solidFill>
               </a:defRPr>
             </a:pPr>
@@ -3139,8 +3139,8 @@
         </p:nvSpPr>
         <p:spPr>
           <a:xfrm>
-            <a:off x="731520" y="1828800"/>
-            <a:ext cx="7680960" cy="457200"/>
+            <a:off x="731520" y="1280160"/>
+            <a:ext cx="7680960" cy="274320"/>
           </a:xfrm>
           <a:prstGeom prst="rect">
             <a:avLst/>
@@ -3154,14 +3154,14 @@
           <a:lstStyle/>
           <a:p>
             <a:pPr algn="l">
-              <a:defRPr sz="2000" b="1">
+              <a:defRPr sz="800" b="0">
                 <a:solidFill>
-                  <a:srgbClr val="F59E0B"/>
+                  <a:srgbClr val="CCCCCC"/>
                 </a:solidFill>
               </a:defRPr>
             </a:pPr>
             <a:r>
-              <a:t>📊 基本数据</a:t>
+              <a:t>━━━━━━━━━━━━━━━━━━━━━━━━━━━━━━━━━━━━━━━━━━━━━━━━━━━━━━━━━━━━</a:t>
             </a:r>
           </a:p>
         </p:txBody>
@@ -3174,8 +3174,8 @@
         </p:nvSpPr>
         <p:spPr>
           <a:xfrm>
-            <a:off x="1097280" y="2286000"/>
-            <a:ext cx="7132320" cy="320040"/>
+            <a:off x="731520" y="1645920"/>
+            <a:ext cx="7680960" cy="411480"/>
           </a:xfrm>
           <a:prstGeom prst="rect">
             <a:avLst/>
@@ -3189,14 +3189,14 @@
           <a:lstStyle/>
           <a:p>
             <a:pPr algn="l">
-              <a:defRPr sz="1600" b="0">
+              <a:defRPr sz="2000" b="1">
                 <a:solidFill>
-                  <a:srgbClr val="CCCCDD"/>
+                  <a:srgbClr val="E67E22"/>
                 </a:solidFill>
               </a:defRPr>
             </a:pPr>
             <a:r>
-              <a:t>· 运营里程：831 公里（世界第一）</a:t>
+              <a:t>📊 基本数据</a:t>
             </a:r>
           </a:p>
         </p:txBody>
@@ -3209,8 +3209,8 @@
         </p:nvSpPr>
         <p:spPr>
           <a:xfrm>
-            <a:off x="1097280" y="2606040"/>
-            <a:ext cx="7132320" cy="320040"/>
+            <a:off x="1097280" y="2148840"/>
+            <a:ext cx="7132320" cy="274320"/>
           </a:xfrm>
           <a:prstGeom prst="rect">
             <a:avLst/>
@@ -3224,14 +3224,14 @@
           <a:lstStyle/>
           <a:p>
             <a:pPr algn="l">
-              <a:defRPr sz="1600" b="0">
+              <a:defRPr sz="1500" b="0">
                 <a:solidFill>
-                  <a:srgbClr val="CCCCDD"/>
+                  <a:srgbClr val="555555"/>
                 </a:solidFill>
               </a:defRPr>
             </a:pPr>
             <a:r>
-              <a:t>· 线路数量：20 条  ·  车站：508 座</a:t>
+              <a:t>· 运营里程：831 公里（世界第一）</a:t>
             </a:r>
           </a:p>
         </p:txBody>
@@ -3244,8 +3244,8 @@
         </p:nvSpPr>
         <p:spPr>
           <a:xfrm>
-            <a:off x="1097280" y="2926080"/>
-            <a:ext cx="7132320" cy="320040"/>
+            <a:off x="1097280" y="2441448"/>
+            <a:ext cx="7132320" cy="274320"/>
           </a:xfrm>
           <a:prstGeom prst="rect">
             <a:avLst/>
@@ -3259,14 +3259,14 @@
           <a:lstStyle/>
           <a:p>
             <a:pPr algn="l">
-              <a:defRPr sz="1600" b="0">
+              <a:defRPr sz="1500" b="0">
                 <a:solidFill>
-                  <a:srgbClr val="CCCCDD"/>
+                  <a:srgbClr val="555555"/>
                 </a:solidFill>
               </a:defRPr>
             </a:pPr>
             <a:r>
-              <a:t>· 日均客流量：约 1000 万人次</a:t>
+              <a:t>· 线路数量：20 条  ·  车站：508 座</a:t>
             </a:r>
           </a:p>
         </p:txBody>
@@ -3279,8 +3279,8 @@
         </p:nvSpPr>
         <p:spPr>
           <a:xfrm>
-            <a:off x="1097280" y="3246120"/>
-            <a:ext cx="7132320" cy="320040"/>
+            <a:off x="1097280" y="2734056"/>
+            <a:ext cx="7132320" cy="274320"/>
           </a:xfrm>
           <a:prstGeom prst="rect">
             <a:avLst/>
@@ -3294,14 +3294,14 @@
           <a:lstStyle/>
           <a:p>
             <a:pPr algn="l">
-              <a:defRPr sz="1600" b="0">
+              <a:defRPr sz="1500" b="0">
                 <a:solidFill>
-                  <a:srgbClr val="CCCCDD"/>
+                  <a:srgbClr val="555555"/>
                 </a:solidFill>
               </a:defRPr>
             </a:pPr>
             <a:r>
-              <a:t>· 最高日客流：1370 万人次</a:t>
+              <a:t>· 日均客流量：约 1000 万人次</a:t>
             </a:r>
           </a:p>
         </p:txBody>
@@ -3314,8 +3314,8 @@
         </p:nvSpPr>
         <p:spPr>
           <a:xfrm>
-            <a:off x="731520" y="3749040"/>
-            <a:ext cx="7680960" cy="457200"/>
+            <a:off x="1097280" y="3026663"/>
+            <a:ext cx="7132320" cy="274320"/>
           </a:xfrm>
           <a:prstGeom prst="rect">
             <a:avLst/>
@@ -3329,14 +3329,14 @@
           <a:lstStyle/>
           <a:p>
             <a:pPr algn="l">
-              <a:defRPr sz="2000" b="1">
+              <a:defRPr sz="1500" b="0">
                 <a:solidFill>
-                  <a:srgbClr val="F59E0B"/>
+                  <a:srgbClr val="555555"/>
                 </a:solidFill>
               </a:defRPr>
             </a:pPr>
             <a:r>
-              <a:t>📅 发展历程</a:t>
+              <a:t>· 最高日客流：1370 万人次</a:t>
             </a:r>
           </a:p>
         </p:txBody>
@@ -3349,8 +3349,8 @@
         </p:nvSpPr>
         <p:spPr>
           <a:xfrm>
-            <a:off x="1097280" y="4206240"/>
-            <a:ext cx="7132320" cy="320040"/>
+            <a:off x="731520" y="3456431"/>
+            <a:ext cx="7680960" cy="411480"/>
           </a:xfrm>
           <a:prstGeom prst="rect">
             <a:avLst/>
@@ -3364,14 +3364,14 @@
           <a:lstStyle/>
           <a:p>
             <a:pPr algn="l">
-              <a:defRPr sz="1600" b="0">
+              <a:defRPr sz="2000" b="1">
                 <a:solidFill>
-                  <a:srgbClr val="CCCCDD"/>
+                  <a:srgbClr val="2980B9"/>
                 </a:solidFill>
               </a:defRPr>
             </a:pPr>
             <a:r>
-              <a:t>· 1993年：1号线通车</a:t>
+              <a:t>📅 发展历程</a:t>
             </a:r>
           </a:p>
         </p:txBody>
@@ -3384,8 +3384,8 @@
         </p:nvSpPr>
         <p:spPr>
           <a:xfrm>
-            <a:off x="1097280" y="4526280"/>
-            <a:ext cx="7132320" cy="320040"/>
+            <a:off x="1097280" y="3959351"/>
+            <a:ext cx="7132320" cy="274320"/>
           </a:xfrm>
           <a:prstGeom prst="rect">
             <a:avLst/>
@@ -3399,14 +3399,14 @@
           <a:lstStyle/>
           <a:p>
             <a:pPr algn="l">
-              <a:defRPr sz="1600" b="0">
+              <a:defRPr sz="1500" b="0">
                 <a:solidFill>
-                  <a:srgbClr val="CCCCDD"/>
+                  <a:srgbClr val="555555"/>
                 </a:solidFill>
               </a:defRPr>
             </a:pPr>
             <a:r>
-              <a:t>· 2010年：世博会前大规模开通</a:t>
+              <a:t>· 1993年：1号线通车（锦江乐园→徐家汇）</a:t>
             </a:r>
           </a:p>
         </p:txBody>
@@ -3419,8 +3419,8 @@
         </p:nvSpPr>
         <p:spPr>
           <a:xfrm>
-            <a:off x="1097280" y="4846320"/>
-            <a:ext cx="7132320" cy="320040"/>
+            <a:off x="1097280" y="4251959"/>
+            <a:ext cx="7132320" cy="274320"/>
           </a:xfrm>
           <a:prstGeom prst="rect">
             <a:avLst/>
@@ -3434,14 +3434,14 @@
           <a:lstStyle/>
           <a:p>
             <a:pPr algn="l">
-              <a:defRPr sz="1600" b="0">
+              <a:defRPr sz="1500" b="0">
                 <a:solidFill>
-                  <a:srgbClr val="CCCCDD"/>
+                  <a:srgbClr val="555555"/>
                 </a:solidFill>
               </a:defRPr>
             </a:pPr>
             <a:r>
-              <a:t>· 2021年：里程突破800公里</a:t>
+              <a:t>· 2010年：世博会前大规模开通</a:t>
             </a:r>
           </a:p>
         </p:txBody>
@@ -3454,8 +3454,8 @@
         </p:nvSpPr>
         <p:spPr>
           <a:xfrm>
-            <a:off x="1097280" y="5166359"/>
-            <a:ext cx="7132320" cy="320040"/>
+            <a:off x="1097280" y="4544568"/>
+            <a:ext cx="7132320" cy="274320"/>
           </a:xfrm>
           <a:prstGeom prst="rect">
             <a:avLst/>
@@ -3469,14 +3469,14 @@
           <a:lstStyle/>
           <a:p>
             <a:pPr algn="l">
-              <a:defRPr sz="1600" b="0">
+              <a:defRPr sz="1500" b="0">
                 <a:solidFill>
-                  <a:srgbClr val="CCCCDD"/>
+                  <a:srgbClr val="555555"/>
                 </a:solidFill>
               </a:defRPr>
             </a:pPr>
             <a:r>
-              <a:t>· 2024年：崇明线在建</a:t>
+              <a:t>· 2021年：14号线开通，里程突破800km</a:t>
             </a:r>
           </a:p>
         </p:txBody>
@@ -3489,8 +3489,8 @@
         </p:nvSpPr>
         <p:spPr>
           <a:xfrm>
-            <a:off x="731520" y="5669279"/>
-            <a:ext cx="7680960" cy="457200"/>
+            <a:off x="1097280" y="4837176"/>
+            <a:ext cx="7132320" cy="274320"/>
           </a:xfrm>
           <a:prstGeom prst="rect">
             <a:avLst/>
@@ -3504,14 +3504,14 @@
           <a:lstStyle/>
           <a:p>
             <a:pPr algn="l">
-              <a:defRPr sz="2000" b="1">
+              <a:defRPr sz="1500" b="0">
                 <a:solidFill>
-                  <a:srgbClr val="F59E0B"/>
+                  <a:srgbClr val="555555"/>
                 </a:solidFill>
               </a:defRPr>
             </a:pPr>
             <a:r>
-              <a:t>🔤 特色</a:t>
+              <a:t>· 2024年：崇明线在建</a:t>
             </a:r>
           </a:p>
         </p:txBody>
@@ -3524,8 +3524,8 @@
         </p:nvSpPr>
         <p:spPr>
           <a:xfrm>
-            <a:off x="1097280" y="6126479"/>
-            <a:ext cx="7132320" cy="320040"/>
+            <a:off x="731520" y="5266944"/>
+            <a:ext cx="7680960" cy="411480"/>
           </a:xfrm>
           <a:prstGeom prst="rect">
             <a:avLst/>
@@ -3539,14 +3539,14 @@
           <a:lstStyle/>
           <a:p>
             <a:pPr algn="l">
-              <a:defRPr sz="1600" b="0">
+              <a:defRPr sz="2000" b="1">
                 <a:solidFill>
-                  <a:srgbClr val="CCCCDD"/>
+                  <a:srgbClr val="8E44AD"/>
                 </a:solidFill>
               </a:defRPr>
             </a:pPr>
             <a:r>
-              <a:t>· 全球第1条商业化磁浮线路</a:t>
+              <a:t>🔤 特色亮点</a:t>
             </a:r>
           </a:p>
         </p:txBody>
@@ -3559,8 +3559,8 @@
         </p:nvSpPr>
         <p:spPr>
           <a:xfrm>
-            <a:off x="1097280" y="6446519"/>
-            <a:ext cx="7132320" cy="320040"/>
+            <a:off x="1097280" y="5769864"/>
+            <a:ext cx="7132320" cy="274320"/>
           </a:xfrm>
           <a:prstGeom prst="rect">
             <a:avLst/>
@@ -3574,14 +3574,14 @@
           <a:lstStyle/>
           <a:p>
             <a:pPr algn="l">
-              <a:defRPr sz="1600" b="0">
+              <a:defRPr sz="1500" b="0">
                 <a:solidFill>
-                  <a:srgbClr val="CCCCDD"/>
+                  <a:srgbClr val="555555"/>
                 </a:solidFill>
               </a:defRPr>
             </a:pPr>
             <a:r>
-              <a:t>· APP扫码 / NFC / 人脸识别过闸</a:t>
+              <a:t>· 全球第1条商业化磁浮线路（龙阳路→浦东机场）</a:t>
             </a:r>
           </a:p>
         </p:txBody>
@@ -3594,8 +3594,8 @@
         </p:nvSpPr>
         <p:spPr>
           <a:xfrm>
-            <a:off x="1097280" y="6766559"/>
-            <a:ext cx="7132320" cy="320040"/>
+            <a:off x="1097280" y="6062472"/>
+            <a:ext cx="7132320" cy="274320"/>
           </a:xfrm>
           <a:prstGeom prst="rect">
             <a:avLst/>
@@ -3609,13 +3609,48 @@
           <a:lstStyle/>
           <a:p>
             <a:pPr algn="l">
-              <a:defRPr sz="1600" b="0">
+              <a:defRPr sz="1500" b="0">
                 <a:solidFill>
-                  <a:srgbClr val="CCCCDD"/>
+                  <a:srgbClr val="555555"/>
                 </a:solidFill>
               </a:defRPr>
             </a:pPr>
             <a:r>
+              <a:t>· APP扫码 / NFC / 人脸识别过闸</a:t>
+            </a:r>
+          </a:p>
+        </p:txBody>
+      </p:sp>
+      <p:sp>
+        <p:nvSpPr>
+          <p:cNvPr id="17" name="TextBox 16"/>
+          <p:cNvSpPr txBox="1"/>
+          <p:nvPr/>
+        </p:nvSpPr>
+        <p:spPr>
+          <a:xfrm>
+            <a:off x="1097280" y="6355080"/>
+            <a:ext cx="7132320" cy="274320"/>
+          </a:xfrm>
+          <a:prstGeom prst="rect">
+            <a:avLst/>
+          </a:prstGeom>
+          <a:noFill/>
+        </p:spPr>
+        <p:txBody>
+          <a:bodyPr wrap="square">
+            <a:spAutoFit/>
+          </a:bodyPr>
+          <a:lstStyle/>
+          <a:p>
+            <a:pPr algn="l">
+              <a:defRPr sz="1500" b="0">
+                <a:solidFill>
+                  <a:srgbClr val="555555"/>
+                </a:solidFill>
+              </a:defRPr>
+            </a:pPr>
+            <a:r>
               <a:t>· 高峰期间隔最短 2 分钟</a:t>
             </a:r>
           </a:p>
@@ -3623,7 +3658,7 @@
       </p:sp>
       <p:sp>
         <p:nvSpPr>
-          <p:cNvPr id="17" name="TextBox 16"/>
+          <p:cNvPr id="18" name="TextBox 17"/>
           <p:cNvSpPr txBox="1"/>
           <p:nvPr/>
         </p:nvSpPr>
@@ -3646,7 +3681,7 @@
             <a:pPr algn="l">
               <a:defRPr sz="1100" b="0">
                 <a:solidFill>
-                  <a:srgbClr val="555577"/>
+                  <a:srgbClr val="AAAAAA"/>
                 </a:solidFill>
               </a:defRPr>
             </a:pPr>
